--- a/classes/parte-11-devsecops-y-seguridad-del-sdlc/245-gestion-de-vulnerabilidades-a-escala/clase-245-presentacion.pptx
+++ b/classes/parte-11-devsecops-y-seguridad-del-sdlc/245-gestion-de-vulnerabilidades-a-escala/clase-245-presentacion.pptx
@@ -17,6 +17,10 @@
     <p:sldId id="265" r:id="rId16"/>
     <p:sldId id="266" r:id="rId17"/>
     <p:sldId id="267" r:id="rId18"/>
+    <p:sldId id="268" r:id="rId19"/>
+    <p:sldId id="269" r:id="rId20"/>
+    <p:sldId id="270" r:id="rId21"/>
+    <p:sldId id="271" r:id="rId22"/>
   </p:sldIdLst>
   <p:sldSz cx="9144000" cy="6858000" type="screen4x3"/>
   <p:notesSz cx="6858000" cy="9144000"/>
@@ -3198,7 +3202,7 @@
                   <a:srgbClr val="0B3D2E"/>
                 </a:solidFill>
               </a:rPr>
-              <a:t>⚠️ Errores comunes</a:t>
+              <a:t>🧪 Laboratorio guiado</a:t>
             </a:r>
           </a:p>
         </p:txBody>
@@ -3236,67 +3240,97 @@
                   <a:srgbClr val="22282E"/>
                 </a:solidFill>
               </a:rPr>
-              <a:t>•  Backlog de 10.000 hallazgos sin tocar — Priorizas por CVSS crudo. Filtra por explotabilidad y exposición; ataca lo alcanzable primero.</a:t>
-            </a:r>
-          </a:p>
-          <a:p>
-            <a:pPr>
-              <a:spcAft>
-                <a:spcPts val="600"/>
-              </a:spcAft>
-            </a:pPr>
-            <a:r>
-              <a:rPr sz="1500">
-                <a:solidFill>
-                  <a:srgbClr val="22282E"/>
-                </a:solidFill>
-              </a:rPr>
-              <a:t>•  El mismo bug aparece 30 veces — No hay deduplicación. Usa una plataforma (DefectDojo) que fusione hallazgos equivalentes.</a:t>
-            </a:r>
-          </a:p>
-          <a:p>
-            <a:pPr>
-              <a:spcAft>
-                <a:spcPts val="600"/>
-              </a:spcAft>
-            </a:pPr>
-            <a:r>
-              <a:rPr sz="1500">
-                <a:solidFill>
-                  <a:srgbClr val="22282E"/>
-                </a:solidFill>
-              </a:rPr>
-              <a:t>•  Los equipos ignoran los tickets — Sin SLA ni dueño claro. Asigna responsable y plazo, y escala incumplimientos.</a:t>
-            </a:r>
-          </a:p>
-          <a:p>
-            <a:pPr>
-              <a:spcAft>
-                <a:spcPts val="600"/>
-              </a:spcAft>
-            </a:pPr>
-            <a:r>
-              <a:rPr sz="1500">
-                <a:solidFill>
-                  <a:srgbClr val="22282E"/>
-                </a:solidFill>
-              </a:rPr>
-              <a:t>•  Se remedia pero reaparece — No se corrigió la causa raíz (dependencia base). Mide tasa de recurrencia y ataca el origen.</a:t>
-            </a:r>
-          </a:p>
-          <a:p>
-            <a:pPr>
-              <a:spcAft>
-                <a:spcPts val="600"/>
-              </a:spcAft>
-            </a:pPr>
-            <a:r>
-              <a:rPr sz="1500">
-                <a:solidFill>
-                  <a:srgbClr val="22282E"/>
-                </a:solidFill>
-              </a:rPr>
-              <a:t>•  Métricas que nadie usa — Reportas número de CVE sin contexto. Mide MTTR, backlog por riesgo y tendencia.</a:t>
+              <a:t>•  Ejercicio de proceso (defensivo, sobre hallazgos propios):</a:t>
+            </a:r>
+          </a:p>
+          <a:p>
+            <a:pPr>
+              <a:spcAft>
+                <a:spcPts val="600"/>
+              </a:spcAft>
+            </a:pPr>
+            <a:r>
+              <a:rPr sz="1500">
+                <a:solidFill>
+                  <a:srgbClr val="22282E"/>
+                </a:solidFill>
+              </a:rPr>
+              <a:t>•  Recolecta hallazgos. Exporta resultados de Trivy (SCA/imagen), Semgrep (SAST) y ZAP (DAST) de tus prácticas en formato JSON.</a:t>
+            </a:r>
+          </a:p>
+          <a:p>
+            <a:pPr>
+              <a:spcAft>
+                <a:spcPts val="600"/>
+              </a:spcAft>
+            </a:pPr>
+            <a:r>
+              <a:rPr sz="1500">
+                <a:solidFill>
+                  <a:srgbClr val="22282E"/>
+                </a:solidFill>
+              </a:rPr>
+              <a:t>•  Consolida en DefectDojo. Crea un producto y engagement, importa los tres informes. Observa cómo deduplica hallazgos repetidos entre escaneos.</a:t>
+            </a:r>
+          </a:p>
+          <a:p>
+            <a:pPr>
+              <a:spcAft>
+                <a:spcPts val="600"/>
+              </a:spcAft>
+            </a:pPr>
+            <a:r>
+              <a:rPr sz="1500">
+                <a:solidFill>
+                  <a:srgbClr val="22282E"/>
+                </a:solidFill>
+              </a:rPr>
+              <a:t>•  Enriquece con señales de riesgo. Para los top 20 hallazgos, añade EPSS y marca los que están en CISA KEV.</a:t>
+            </a:r>
+          </a:p>
+          <a:p>
+            <a:pPr>
+              <a:spcAft>
+                <a:spcPts val="600"/>
+              </a:spcAft>
+            </a:pPr>
+            <a:r>
+              <a:rPr sz="1500">
+                <a:solidFill>
+                  <a:srgbClr val="22282E"/>
+                </a:solidFill>
+              </a:rPr>
+              <a:t>•  Prioriza. Ordena por un score compuesto: severidad × exposición (¿internet-facing?) × criticidad del activo, elevando los KEV/EPSS alto. Documenta el criterio.</a:t>
+            </a:r>
+          </a:p>
+          <a:p>
+            <a:pPr>
+              <a:spcAft>
+                <a:spcPts val="600"/>
+              </a:spcAft>
+            </a:pPr>
+            <a:r>
+              <a:rPr sz="1500">
+                <a:solidFill>
+                  <a:srgbClr val="22282E"/>
+                </a:solidFill>
+              </a:rPr>
+              <a:t>•  Asigna SLAs. Define plazos, p. ej.: Crítica explotable 7 días, Alta 30, Media 90, Baja 180. Asigna dueño a cada hallazgo top.</a:t>
+            </a:r>
+          </a:p>
+          <a:p>
+            <a:pPr>
+              <a:spcAft>
+                <a:spcPts val="600"/>
+              </a:spcAft>
+            </a:pPr>
+            <a:r>
+              <a:rPr sz="1500">
+                <a:solidFill>
+                  <a:srgbClr val="22282E"/>
+                </a:solidFill>
+              </a:rPr>
+              <a:t>•  Documenta excepciones con VEX. Para un CVE en una función que no usas, redacta un statement "not affected" con justificación.</a:t>
             </a:r>
           </a:p>
         </p:txBody>
@@ -3347,7 +3381,7 @@
                   <a:srgbClr val="0B3D2E"/>
                 </a:solidFill>
               </a:rPr>
-              <a:t>❓ Preguntas frecuentes</a:t>
+              <a:t>✍️ Ejercicios</a:t>
             </a:r>
           </a:p>
         </p:txBody>
@@ -3385,97 +3419,82 @@
                   <a:srgbClr val="22282E"/>
                 </a:solidFill>
               </a:rPr>
-              <a:t>•  ❓ ¿Por qué no arreglar simplemente todo lo "crítico"?</a:t>
-            </a:r>
-          </a:p>
-          <a:p>
-            <a:pPr>
-              <a:spcAft>
-                <a:spcPts val="600"/>
-              </a:spcAft>
-            </a:pPr>
-            <a:r>
-              <a:rPr sz="1500">
-                <a:solidFill>
-                  <a:srgbClr val="22282E"/>
-                </a:solidFill>
-              </a:rPr>
-              <a:t>•  Porque "crítico" en CVSS no significa "explotable en tu contexto". Un crítico sin exploit y sin exposición puede esperar frente a un alto que está en KEV y es internet-facing.</a:t>
-            </a:r>
-          </a:p>
-          <a:p>
-            <a:pPr>
-              <a:spcAft>
-                <a:spcPts val="600"/>
-              </a:spcAft>
-            </a:pPr>
-            <a:r>
-              <a:rPr sz="1500">
-                <a:solidFill>
-                  <a:srgbClr val="22282E"/>
-                </a:solidFill>
-              </a:rPr>
-              <a:t>•  ❓ ¿Qué SLAs son razonables?</a:t>
-            </a:r>
-          </a:p>
-          <a:p>
-            <a:pPr>
-              <a:spcAft>
-                <a:spcPts val="600"/>
-              </a:spcAft>
-            </a:pPr>
-            <a:r>
-              <a:rPr sz="1500">
-                <a:solidFill>
-                  <a:srgbClr val="22282E"/>
-                </a:solidFill>
-              </a:rPr>
-              <a:t>•  Depende del riesgo y del sector, pero un patrón común: crítico explotable en días, alto en semanas, medio en meses. Lo importante es que sean explícitos y medibles.</a:t>
-            </a:r>
-          </a:p>
-          <a:p>
-            <a:pPr>
-              <a:spcAft>
-                <a:spcPts val="600"/>
-              </a:spcAft>
-            </a:pPr>
-            <a:r>
-              <a:rPr sz="1500">
-                <a:solidFill>
-                  <a:srgbClr val="22282E"/>
-                </a:solidFill>
-              </a:rPr>
-              <a:t>•  ❓ ¿Necesito DefectDojo o basta con Jira?</a:t>
-            </a:r>
-          </a:p>
-          <a:p>
-            <a:pPr>
-              <a:spcAft>
-                <a:spcPts val="600"/>
-              </a:spcAft>
-            </a:pPr>
-            <a:r>
-              <a:rPr sz="1500">
-                <a:solidFill>
-                  <a:srgbClr val="22282E"/>
-                </a:solidFill>
-              </a:rPr>
-              <a:t>•  Para pocos repos, un tracker con buena disciplina sirve. A escala, una plataforma que importe múltiples formatos, deduplique y calcule métricas ahorra muchísimo esfuerzo.</a:t>
-            </a:r>
-          </a:p>
-          <a:p>
-            <a:pPr>
-              <a:spcAft>
-                <a:spcPts val="600"/>
-              </a:spcAft>
-            </a:pPr>
-            <a:r>
-              <a:rPr sz="1500">
-                <a:solidFill>
-                  <a:srgbClr val="22282E"/>
-                </a:solidFill>
-              </a:rPr>
-              <a:t>•  ❓ ¿Qué es y para qué sirve VEX?</a:t>
+              <a:t>•  Dibuja el ciclo de vida de una vulnerabilidad en tu organización.</a:t>
+            </a:r>
+          </a:p>
+          <a:p>
+            <a:pPr>
+              <a:spcAft>
+                <a:spcPts val="600"/>
+              </a:spcAft>
+            </a:pPr>
+            <a:r>
+              <a:rPr sz="1500">
+                <a:solidFill>
+                  <a:srgbClr val="22282E"/>
+                </a:solidFill>
+              </a:rPr>
+              <a:t>•  Consolida hallazgos de dos herramientas y cuenta los duplicados eliminados.</a:t>
+            </a:r>
+          </a:p>
+          <a:p>
+            <a:pPr>
+              <a:spcAft>
+                <a:spcPts val="600"/>
+              </a:spcAft>
+            </a:pPr>
+            <a:r>
+              <a:rPr sz="1500">
+                <a:solidFill>
+                  <a:srgbClr val="22282E"/>
+                </a:solidFill>
+              </a:rPr>
+              <a:t>•  Prioriza 10 hallazgos con un modelo que combine CVSS, EPSS y KEV.</a:t>
+            </a:r>
+          </a:p>
+          <a:p>
+            <a:pPr>
+              <a:spcAft>
+                <a:spcPts val="600"/>
+              </a:spcAft>
+            </a:pPr>
+            <a:r>
+              <a:rPr sz="1500">
+                <a:solidFill>
+                  <a:srgbClr val="22282E"/>
+                </a:solidFill>
+              </a:rPr>
+              <a:t>•  Define una tabla de SLAs por severidad y justifica los plazos.</a:t>
+            </a:r>
+          </a:p>
+          <a:p>
+            <a:pPr>
+              <a:spcAft>
+                <a:spcPts val="600"/>
+              </a:spcAft>
+            </a:pPr>
+            <a:r>
+              <a:rPr sz="1500">
+                <a:solidFill>
+                  <a:srgbClr val="22282E"/>
+                </a:solidFill>
+              </a:rPr>
+              <a:t>•  Redacta un statement VEX "not affected" para un CVE concreto.</a:t>
+            </a:r>
+          </a:p>
+          <a:p>
+            <a:pPr>
+              <a:spcAft>
+                <a:spcPts val="600"/>
+              </a:spcAft>
+            </a:pPr>
+            <a:r>
+              <a:rPr sz="1500">
+                <a:solidFill>
+                  <a:srgbClr val="22282E"/>
+                </a:solidFill>
+              </a:rPr>
+              <a:t>•  Calcula el MTTR de un conjunto de hallazgos con fechas de apertura/cierre.</a:t>
             </a:r>
           </a:p>
         </p:txBody>
@@ -3526,7 +3545,7 @@
                   <a:srgbClr val="0B3D2E"/>
                 </a:solidFill>
               </a:rPr>
-              <a:t>🔗 Referencias</a:t>
+              <a:t>📝 Reto verificable</a:t>
             </a:r>
           </a:p>
         </p:txBody>
@@ -3564,6 +3583,513 @@
                   <a:srgbClr val="22282E"/>
                 </a:solidFill>
               </a:rPr>
+              <a:t>•  Opera un mini-programa de gestión de vulnerabilidades sobre hallazgos reales de tus prácticas.</a:t>
+            </a:r>
+          </a:p>
+          <a:p>
+            <a:pPr>
+              <a:spcAft>
+                <a:spcPts val="600"/>
+              </a:spcAft>
+            </a:pPr>
+            <a:r>
+              <a:rPr sz="1500">
+                <a:solidFill>
+                  <a:srgbClr val="22282E"/>
+                </a:solidFill>
+              </a:rPr>
+              <a:t>•  Criterio de aceptación: (a) los hallazgos de al menos tres herramientas están consolidados</a:t>
+            </a:r>
+          </a:p>
+          <a:p>
+            <a:pPr>
+              <a:spcAft>
+                <a:spcPts val="600"/>
+              </a:spcAft>
+            </a:pPr>
+            <a:r>
+              <a:rPr sz="1500">
+                <a:solidFill>
+                  <a:srgbClr val="22282E"/>
+                </a:solidFill>
+              </a:rPr>
+              <a:t>•  y deduplicados; (b) existe un modelo de priorización documentado que va más allá de CVSS</a:t>
+            </a:r>
+          </a:p>
+          <a:p>
+            <a:pPr>
+              <a:spcAft>
+                <a:spcPts val="600"/>
+              </a:spcAft>
+            </a:pPr>
+            <a:r>
+              <a:rPr sz="1500">
+                <a:solidFill>
+                  <a:srgbClr val="22282E"/>
+                </a:solidFill>
+              </a:rPr>
+              <a:t>•  (incluye EPSS/KEV/exposición); (c) hay SLAs por severidad y cada hallazgo top tiene dueño y</a:t>
+            </a:r>
+          </a:p>
+          <a:p>
+            <a:pPr>
+              <a:spcAft>
+                <a:spcPts val="600"/>
+              </a:spcAft>
+            </a:pPr>
+            <a:r>
+              <a:rPr sz="1500">
+                <a:solidFill>
+                  <a:srgbClr val="22282E"/>
+                </a:solidFill>
+              </a:rPr>
+              <a:t>•  plazo; (d) al menos una excepción está documentada como VEX; y (e) se reporta MTTR y backlog</a:t>
+            </a:r>
+          </a:p>
+          <a:p>
+            <a:pPr>
+              <a:spcAft>
+                <a:spcPts val="600"/>
+              </a:spcAft>
+            </a:pPr>
+            <a:r>
+              <a:rPr sz="1500">
+                <a:solidFill>
+                  <a:srgbClr val="22282E"/>
+                </a:solidFill>
+              </a:rPr>
+              <a:t>•  por severidad.</a:t>
+            </a:r>
+          </a:p>
+        </p:txBody>
+      </p:sp>
+    </p:spTree>
+  </p:cSld>
+  <p:clrMapOvr>
+    <a:masterClrMapping/>
+  </p:clrMapOvr>
+</p:sld>
+</file>
+
+<file path=ppt/slides/slide13.xml><?xml version="1.0" encoding="utf-8"?>
+<p:sld xmlns:a="http://schemas.openxmlformats.org/drawingml/2006/main" xmlns:p="http://schemas.openxmlformats.org/presentationml/2006/main" xmlns:r="http://schemas.openxmlformats.org/officeDocument/2006/relationships">
+  <p:cSld>
+    <p:spTree>
+      <p:nvGrpSpPr>
+        <p:cNvPr id="1" name=""/>
+        <p:cNvGrpSpPr/>
+        <p:nvPr/>
+      </p:nvGrpSpPr>
+      <p:grpSpPr/>
+      <p:sp>
+        <p:nvSpPr>
+          <p:cNvPr id="2" name="TextBox 1"/>
+          <p:cNvSpPr txBox="1"/>
+          <p:nvPr/>
+        </p:nvSpPr>
+        <p:spPr>
+          <a:xfrm>
+            <a:off x="457200" y="320040"/>
+            <a:ext cx="8229600" cy="822960"/>
+          </a:xfrm>
+          <a:prstGeom prst="rect">
+            <a:avLst/>
+          </a:prstGeom>
+          <a:noFill/>
+        </p:spPr>
+        <p:txBody>
+          <a:bodyPr wrap="square">
+            <a:spAutoFit/>
+          </a:bodyPr>
+          <a:lstStyle/>
+          <a:p>
+            <a:r>
+              <a:rPr sz="2600" b="1">
+                <a:solidFill>
+                  <a:srgbClr val="0B3D2E"/>
+                </a:solidFill>
+              </a:rPr>
+              <a:t>⚠️ Errores comunes</a:t>
+            </a:r>
+          </a:p>
+        </p:txBody>
+      </p:sp>
+      <p:sp>
+        <p:nvSpPr>
+          <p:cNvPr id="3" name="TextBox 2"/>
+          <p:cNvSpPr txBox="1"/>
+          <p:nvPr/>
+        </p:nvSpPr>
+        <p:spPr>
+          <a:xfrm>
+            <a:off x="457200" y="1280160"/>
+            <a:ext cx="8229600" cy="4937760"/>
+          </a:xfrm>
+          <a:prstGeom prst="rect">
+            <a:avLst/>
+          </a:prstGeom>
+          <a:noFill/>
+        </p:spPr>
+        <p:txBody>
+          <a:bodyPr wrap="square">
+            <a:spAutoFit/>
+          </a:bodyPr>
+          <a:lstStyle/>
+          <a:p>
+            <a:pPr>
+              <a:spcAft>
+                <a:spcPts val="600"/>
+              </a:spcAft>
+            </a:pPr>
+            <a:r>
+              <a:rPr sz="1500">
+                <a:solidFill>
+                  <a:srgbClr val="22282E"/>
+                </a:solidFill>
+              </a:rPr>
+              <a:t>•  Backlog de 10.000 hallazgos sin tocar — Priorizas por CVSS crudo. Filtra por explotabilidad y exposición; ataca lo alcanzable primero.</a:t>
+            </a:r>
+          </a:p>
+          <a:p>
+            <a:pPr>
+              <a:spcAft>
+                <a:spcPts val="600"/>
+              </a:spcAft>
+            </a:pPr>
+            <a:r>
+              <a:rPr sz="1500">
+                <a:solidFill>
+                  <a:srgbClr val="22282E"/>
+                </a:solidFill>
+              </a:rPr>
+              <a:t>•  El mismo bug aparece 30 veces — No hay deduplicación. Usa una plataforma (DefectDojo) que fusione hallazgos equivalentes.</a:t>
+            </a:r>
+          </a:p>
+          <a:p>
+            <a:pPr>
+              <a:spcAft>
+                <a:spcPts val="600"/>
+              </a:spcAft>
+            </a:pPr>
+            <a:r>
+              <a:rPr sz="1500">
+                <a:solidFill>
+                  <a:srgbClr val="22282E"/>
+                </a:solidFill>
+              </a:rPr>
+              <a:t>•  Los equipos ignoran los tickets — Sin SLA ni dueño claro. Asigna responsable y plazo, y escala incumplimientos.</a:t>
+            </a:r>
+          </a:p>
+          <a:p>
+            <a:pPr>
+              <a:spcAft>
+                <a:spcPts val="600"/>
+              </a:spcAft>
+            </a:pPr>
+            <a:r>
+              <a:rPr sz="1500">
+                <a:solidFill>
+                  <a:srgbClr val="22282E"/>
+                </a:solidFill>
+              </a:rPr>
+              <a:t>•  Se remedia pero reaparece — No se corrigió la causa raíz (dependencia base). Mide tasa de recurrencia y ataca el origen.</a:t>
+            </a:r>
+          </a:p>
+          <a:p>
+            <a:pPr>
+              <a:spcAft>
+                <a:spcPts val="600"/>
+              </a:spcAft>
+            </a:pPr>
+            <a:r>
+              <a:rPr sz="1500">
+                <a:solidFill>
+                  <a:srgbClr val="22282E"/>
+                </a:solidFill>
+              </a:rPr>
+              <a:t>•  Métricas que nadie usa — Reportas número de CVE sin contexto. Mide MTTR, backlog por riesgo y tendencia.</a:t>
+            </a:r>
+          </a:p>
+        </p:txBody>
+      </p:sp>
+    </p:spTree>
+  </p:cSld>
+  <p:clrMapOvr>
+    <a:masterClrMapping/>
+  </p:clrMapOvr>
+</p:sld>
+</file>
+
+<file path=ppt/slides/slide14.xml><?xml version="1.0" encoding="utf-8"?>
+<p:sld xmlns:a="http://schemas.openxmlformats.org/drawingml/2006/main" xmlns:p="http://schemas.openxmlformats.org/presentationml/2006/main" xmlns:r="http://schemas.openxmlformats.org/officeDocument/2006/relationships">
+  <p:cSld>
+    <p:spTree>
+      <p:nvGrpSpPr>
+        <p:cNvPr id="1" name=""/>
+        <p:cNvGrpSpPr/>
+        <p:nvPr/>
+      </p:nvGrpSpPr>
+      <p:grpSpPr/>
+      <p:sp>
+        <p:nvSpPr>
+          <p:cNvPr id="2" name="TextBox 1"/>
+          <p:cNvSpPr txBox="1"/>
+          <p:nvPr/>
+        </p:nvSpPr>
+        <p:spPr>
+          <a:xfrm>
+            <a:off x="457200" y="320040"/>
+            <a:ext cx="8229600" cy="822960"/>
+          </a:xfrm>
+          <a:prstGeom prst="rect">
+            <a:avLst/>
+          </a:prstGeom>
+          <a:noFill/>
+        </p:spPr>
+        <p:txBody>
+          <a:bodyPr wrap="square">
+            <a:spAutoFit/>
+          </a:bodyPr>
+          <a:lstStyle/>
+          <a:p>
+            <a:r>
+              <a:rPr sz="2600" b="1">
+                <a:solidFill>
+                  <a:srgbClr val="0B3D2E"/>
+                </a:solidFill>
+              </a:rPr>
+              <a:t>❓ Preguntas frecuentes</a:t>
+            </a:r>
+          </a:p>
+        </p:txBody>
+      </p:sp>
+      <p:sp>
+        <p:nvSpPr>
+          <p:cNvPr id="3" name="TextBox 2"/>
+          <p:cNvSpPr txBox="1"/>
+          <p:nvPr/>
+        </p:nvSpPr>
+        <p:spPr>
+          <a:xfrm>
+            <a:off x="457200" y="1280160"/>
+            <a:ext cx="8229600" cy="4937760"/>
+          </a:xfrm>
+          <a:prstGeom prst="rect">
+            <a:avLst/>
+          </a:prstGeom>
+          <a:noFill/>
+        </p:spPr>
+        <p:txBody>
+          <a:bodyPr wrap="square">
+            <a:spAutoFit/>
+          </a:bodyPr>
+          <a:lstStyle/>
+          <a:p>
+            <a:pPr>
+              <a:spcAft>
+                <a:spcPts val="600"/>
+              </a:spcAft>
+            </a:pPr>
+            <a:r>
+              <a:rPr sz="1500">
+                <a:solidFill>
+                  <a:srgbClr val="22282E"/>
+                </a:solidFill>
+              </a:rPr>
+              <a:t>•  ❓ ¿Por qué no arreglar simplemente todo lo "crítico"?</a:t>
+            </a:r>
+          </a:p>
+          <a:p>
+            <a:pPr>
+              <a:spcAft>
+                <a:spcPts val="600"/>
+              </a:spcAft>
+            </a:pPr>
+            <a:r>
+              <a:rPr sz="1500">
+                <a:solidFill>
+                  <a:srgbClr val="22282E"/>
+                </a:solidFill>
+              </a:rPr>
+              <a:t>•  Porque "crítico" en CVSS no significa "explotable en tu contexto". Un crítico sin exploit y sin exposición puede esperar frente a un alto que está en KEV y es internet-facing.</a:t>
+            </a:r>
+          </a:p>
+          <a:p>
+            <a:pPr>
+              <a:spcAft>
+                <a:spcPts val="600"/>
+              </a:spcAft>
+            </a:pPr>
+            <a:r>
+              <a:rPr sz="1500">
+                <a:solidFill>
+                  <a:srgbClr val="22282E"/>
+                </a:solidFill>
+              </a:rPr>
+              <a:t>•  ❓ ¿Qué SLAs son razonables?</a:t>
+            </a:r>
+          </a:p>
+          <a:p>
+            <a:pPr>
+              <a:spcAft>
+                <a:spcPts val="600"/>
+              </a:spcAft>
+            </a:pPr>
+            <a:r>
+              <a:rPr sz="1500">
+                <a:solidFill>
+                  <a:srgbClr val="22282E"/>
+                </a:solidFill>
+              </a:rPr>
+              <a:t>•  Depende del riesgo y del sector, pero un patrón común: crítico explotable en días, alto en semanas, medio en meses. Lo importante es que sean explícitos y medibles.</a:t>
+            </a:r>
+          </a:p>
+          <a:p>
+            <a:pPr>
+              <a:spcAft>
+                <a:spcPts val="600"/>
+              </a:spcAft>
+            </a:pPr>
+            <a:r>
+              <a:rPr sz="1500">
+                <a:solidFill>
+                  <a:srgbClr val="22282E"/>
+                </a:solidFill>
+              </a:rPr>
+              <a:t>•  ❓ ¿Necesito DefectDojo o basta con Jira?</a:t>
+            </a:r>
+          </a:p>
+          <a:p>
+            <a:pPr>
+              <a:spcAft>
+                <a:spcPts val="600"/>
+              </a:spcAft>
+            </a:pPr>
+            <a:r>
+              <a:rPr sz="1500">
+                <a:solidFill>
+                  <a:srgbClr val="22282E"/>
+                </a:solidFill>
+              </a:rPr>
+              <a:t>•  Para pocos repos, un tracker con buena disciplina sirve. A escala, una plataforma que importe múltiples formatos, deduplique y calcule métricas ahorra muchísimo esfuerzo.</a:t>
+            </a:r>
+          </a:p>
+          <a:p>
+            <a:pPr>
+              <a:spcAft>
+                <a:spcPts val="600"/>
+              </a:spcAft>
+            </a:pPr>
+            <a:r>
+              <a:rPr sz="1500">
+                <a:solidFill>
+                  <a:srgbClr val="22282E"/>
+                </a:solidFill>
+              </a:rPr>
+              <a:t>•  ❓ ¿Qué es y para qué sirve VEX?</a:t>
+            </a:r>
+          </a:p>
+        </p:txBody>
+      </p:sp>
+    </p:spTree>
+  </p:cSld>
+  <p:clrMapOvr>
+    <a:masterClrMapping/>
+  </p:clrMapOvr>
+</p:sld>
+</file>
+
+<file path=ppt/slides/slide15.xml><?xml version="1.0" encoding="utf-8"?>
+<p:sld xmlns:a="http://schemas.openxmlformats.org/drawingml/2006/main" xmlns:p="http://schemas.openxmlformats.org/presentationml/2006/main" xmlns:r="http://schemas.openxmlformats.org/officeDocument/2006/relationships">
+  <p:cSld>
+    <p:spTree>
+      <p:nvGrpSpPr>
+        <p:cNvPr id="1" name=""/>
+        <p:cNvGrpSpPr/>
+        <p:nvPr/>
+      </p:nvGrpSpPr>
+      <p:grpSpPr/>
+      <p:sp>
+        <p:nvSpPr>
+          <p:cNvPr id="2" name="TextBox 1"/>
+          <p:cNvSpPr txBox="1"/>
+          <p:nvPr/>
+        </p:nvSpPr>
+        <p:spPr>
+          <a:xfrm>
+            <a:off x="457200" y="320040"/>
+            <a:ext cx="8229600" cy="822960"/>
+          </a:xfrm>
+          <a:prstGeom prst="rect">
+            <a:avLst/>
+          </a:prstGeom>
+          <a:noFill/>
+        </p:spPr>
+        <p:txBody>
+          <a:bodyPr wrap="square">
+            <a:spAutoFit/>
+          </a:bodyPr>
+          <a:lstStyle/>
+          <a:p>
+            <a:r>
+              <a:rPr sz="2600" b="1">
+                <a:solidFill>
+                  <a:srgbClr val="0B3D2E"/>
+                </a:solidFill>
+              </a:rPr>
+              <a:t>🔗 Referencias</a:t>
+            </a:r>
+          </a:p>
+        </p:txBody>
+      </p:sp>
+      <p:sp>
+        <p:nvSpPr>
+          <p:cNvPr id="3" name="TextBox 2"/>
+          <p:cNvSpPr txBox="1"/>
+          <p:nvPr/>
+        </p:nvSpPr>
+        <p:spPr>
+          <a:xfrm>
+            <a:off x="457200" y="1280160"/>
+            <a:ext cx="8229600" cy="4937760"/>
+          </a:xfrm>
+          <a:prstGeom prst="rect">
+            <a:avLst/>
+          </a:prstGeom>
+          <a:noFill/>
+        </p:spPr>
+        <p:txBody>
+          <a:bodyPr wrap="square">
+            <a:spAutoFit/>
+          </a:bodyPr>
+          <a:lstStyle/>
+          <a:p>
+            <a:pPr>
+              <a:spcAft>
+                <a:spcPts val="600"/>
+              </a:spcAft>
+            </a:pPr>
+            <a:r>
+              <a:rPr sz="1500">
+                <a:solidFill>
+                  <a:srgbClr val="22282E"/>
+                </a:solidFill>
+              </a:rPr>
+              <a:t>•  🏢 En la empresa: Qualys / Tenable / Rapid7 para el escaneo a escala y DefectDojo para orquestar, deduplicar y dar seguimiento a los hallazgos.</a:t>
+            </a:r>
+          </a:p>
+          <a:p>
+            <a:pPr>
+              <a:spcAft>
+                <a:spcPts val="600"/>
+              </a:spcAft>
+            </a:pPr>
+            <a:r>
+              <a:rPr sz="1500">
+                <a:solidFill>
+                  <a:srgbClr val="22282E"/>
+                </a:solidFill>
+              </a:rPr>
               <a:t>•  NIST SP 800-40r4 Patch Management — &lt;https://csrc.nist.gov/pubs/sp/800/40/r4/final&gt;</a:t>
             </a:r>
           </a:p>
@@ -3629,6 +4155,81 @@
           </a:p>
         </p:txBody>
       </p:sp>
+    </p:spTree>
+  </p:cSld>
+  <p:clrMapOvr>
+    <a:masterClrMapping/>
+  </p:clrMapOvr>
+</p:sld>
+</file>
+
+<file path=ppt/slides/slide16.xml><?xml version="1.0" encoding="utf-8"?>
+<p:sld xmlns:a="http://schemas.openxmlformats.org/drawingml/2006/main" xmlns:p="http://schemas.openxmlformats.org/presentationml/2006/main" xmlns:r="http://schemas.openxmlformats.org/officeDocument/2006/relationships">
+  <p:cSld>
+    <p:spTree>
+      <p:nvGrpSpPr>
+        <p:cNvPr id="1" name=""/>
+        <p:cNvGrpSpPr/>
+        <p:nvPr/>
+      </p:nvGrpSpPr>
+      <p:grpSpPr/>
+      <p:sp>
+        <p:nvSpPr>
+          <p:cNvPr id="2" name="TextBox 1"/>
+          <p:cNvSpPr txBox="1"/>
+          <p:nvPr/>
+        </p:nvSpPr>
+        <p:spPr>
+          <a:xfrm>
+            <a:off x="457200" y="274320"/>
+            <a:ext cx="8229600" cy="640080"/>
+          </a:xfrm>
+          <a:prstGeom prst="rect">
+            <a:avLst/>
+          </a:prstGeom>
+          <a:noFill/>
+        </p:spPr>
+        <p:txBody>
+          <a:bodyPr wrap="square">
+            <a:spAutoFit/>
+          </a:bodyPr>
+          <a:lstStyle/>
+          <a:p>
+            <a:r>
+              <a:rPr sz="2200" b="1">
+                <a:solidFill>
+                  <a:srgbClr val="0B3D2E"/>
+                </a:solidFill>
+              </a:rPr>
+              <a:t>Diagrama de la clase</a:t>
+            </a:r>
+          </a:p>
+        </p:txBody>
+      </p:sp>
+      <p:pic>
+        <p:nvPicPr>
+          <p:cNvPr id="3" name="Picture 2" descr="41a9ff0a8b120ed1.png"/>
+          <p:cNvPicPr>
+            <a:picLocks noChangeAspect="1"/>
+          </p:cNvPicPr>
+          <p:nvPr/>
+        </p:nvPicPr>
+        <p:blipFill>
+          <a:blip r:embed="rId2"/>
+          <a:stretch>
+            <a:fillRect/>
+          </a:stretch>
+        </p:blipFill>
+        <p:spPr>
+          <a:xfrm>
+            <a:off x="457200" y="3515868"/>
+            <a:ext cx="8229600" cy="466344"/>
+          </a:xfrm>
+          <a:prstGeom prst="rect">
+            <a:avLst/>
+          </a:prstGeom>
+        </p:spPr>
+      </p:pic>
     </p:spTree>
   </p:cSld>
   <p:clrMapOvr>
@@ -4167,7 +4768,7 @@
                   <a:srgbClr val="0B3D2E"/>
                 </a:solidFill>
               </a:rPr>
-              <a:t>📖 Definiciones y características</a:t>
+              <a:t>🧠 Explicación en profundidad</a:t>
             </a:r>
           </a:p>
         </p:txBody>
@@ -4205,82 +4806,82 @@
                   <a:srgbClr val="22282E"/>
                 </a:solidFill>
               </a:rPr>
-              <a:t>•  Gestión de vulnerabilidades: proceso continuo de identificar, evaluar, tratar y reportar vulnerabilidades. Característica: es un ciclo, no un evento puntual.</a:t>
-            </a:r>
-          </a:p>
-          <a:p>
-            <a:pPr>
-              <a:spcAft>
-                <a:spcPts val="600"/>
-              </a:spcAft>
-            </a:pPr>
-            <a:r>
-              <a:rPr sz="1500">
-                <a:solidFill>
-                  <a:srgbClr val="22282E"/>
-                </a:solidFill>
-              </a:rPr>
-              <a:t>•  Triage: clasificar un hallazgo (real/falso, severidad, dueño). Característica: filtra ruido antes de asignar trabajo.</a:t>
-            </a:r>
-          </a:p>
-          <a:p>
-            <a:pPr>
-              <a:spcAft>
-                <a:spcPts val="600"/>
-              </a:spcAft>
-            </a:pPr>
-            <a:r>
-              <a:rPr sz="1500">
-                <a:solidFill>
-                  <a:srgbClr val="22282E"/>
-                </a:solidFill>
-              </a:rPr>
-              <a:t>•  Priorización basada en riesgo (RBVM): ordenar por riesgo real, no solo por CVSS. Característica: combina severidad, explotabilidad, exposición y valor del activo.</a:t>
-            </a:r>
-          </a:p>
-          <a:p>
-            <a:pPr>
-              <a:spcAft>
-                <a:spcPts val="600"/>
-              </a:spcAft>
-            </a:pPr>
-            <a:r>
-              <a:rPr sz="1500">
-                <a:solidFill>
-                  <a:srgbClr val="22282E"/>
-                </a:solidFill>
-              </a:rPr>
-              <a:t>•  SLA de remediación: plazo máximo para corregir según severidad. Característica: hace el compromiso medible y auditable.</a:t>
-            </a:r>
-          </a:p>
-          <a:p>
-            <a:pPr>
-              <a:spcAft>
-                <a:spcPts val="600"/>
-              </a:spcAft>
-            </a:pPr>
-            <a:r>
-              <a:rPr sz="1500">
-                <a:solidFill>
-                  <a:srgbClr val="22282E"/>
-                </a:solidFill>
-              </a:rPr>
-              <a:t>•  VEX: Vulnerability Exploitability eXchange, documento que declara si un CVE es explotable en tu producto. Característica: reduce ruido justificando "not affected".</a:t>
-            </a:r>
-          </a:p>
-          <a:p>
-            <a:pPr>
-              <a:spcAft>
-                <a:spcPts val="600"/>
-              </a:spcAft>
-            </a:pPr>
-            <a:r>
-              <a:rPr sz="1500">
-                <a:solidFill>
-                  <a:srgbClr val="22282E"/>
-                </a:solidFill>
-              </a:rPr>
-              <a:t>•  MTTR: tiempo medio de remediación. Característica: métrica clave de la salud del programa.</a:t>
+              <a:t>•  Un escaneo produce observaciones; un programa produce resultados. Para ello necesita inventario, propietario, deduplicación, validación, priorización, tratamiento, verificación y aprendizaje. Sin…</a:t>
+            </a:r>
+          </a:p>
+          <a:p>
+            <a:pPr>
+              <a:spcAft>
+                <a:spcPts val="600"/>
+              </a:spcAft>
+            </a:pPr>
+            <a:r>
+              <a:rPr sz="1500">
+                <a:solidFill>
+                  <a:srgbClr val="22282E"/>
+                </a:solidFill>
+              </a:rPr>
+              <a:t>•  La deduplicación no debe borrar contexto: un mismo CVE en una estación aislada y en una API pública comparte identificador, pero no exposición ni propietario. Se conserva la instancia por activo y se…</a:t>
+            </a:r>
+          </a:p>
+          <a:p>
+            <a:pPr>
+              <a:spcAft>
+                <a:spcPts val="600"/>
+              </a:spcAft>
+            </a:pPr>
+            <a:r>
+              <a:rPr sz="1500">
+                <a:solidFill>
+                  <a:srgbClr val="22282E"/>
+                </a:solidFill>
+              </a:rPr>
+              <a:t>•  CVSS describe severidad técnica bajo supuestos; KEV aporta evidencia de explotación conocida; EPSS estima probabilidad de explotación; el negocio aporta criticidad, exposición, privilegio y…</a:t>
+            </a:r>
+          </a:p>
+          <a:p>
+            <a:pPr>
+              <a:spcAft>
+                <a:spcPts val="600"/>
+              </a:spcAft>
+            </a:pPr>
+            <a:r>
+              <a:rPr sz="1500">
+                <a:solidFill>
+                  <a:srgbClr val="22282E"/>
+                </a:solidFill>
+              </a:rPr>
+              <a:t>•  El tratamiento no siempre es «parchear». Puede actualizar, retirar, reconfigurar, aislar, deshabilitar una función o aceptar temporalmente con aprobación. La aceptación registra el riesgo residual…</a:t>
+            </a:r>
+          </a:p>
+          <a:p>
+            <a:pPr>
+              <a:spcAft>
+                <a:spcPts val="600"/>
+              </a:spcAft>
+            </a:pPr>
+            <a:r>
+              <a:rPr sz="1500">
+                <a:solidFill>
+                  <a:srgbClr val="22282E"/>
+                </a:solidFill>
+              </a:rPr>
+              <a:t>•  Contar vulnerabilidades abiertas puede subir cuando mejora la cobertura. Son más útiles la edad por riesgo, tiempo hasta triage y remediación, porcentaje de activos con propietario, reaperturas…</a:t>
+            </a:r>
+          </a:p>
+          <a:p>
+            <a:pPr>
+              <a:spcAft>
+                <a:spcPts val="600"/>
+              </a:spcAft>
+            </a:pPr>
+            <a:r>
+              <a:rPr sz="1500">
+                <a:solidFill>
+                  <a:srgbClr val="22282E"/>
+                </a:solidFill>
+              </a:rPr>
+              <a:t>•  Tras integrar escáneres, DefectDojo recibe mil hallazgos críticos duplicados. El equipo normaliza identificadores, conserva instancias por activo y separa imágenes no desplegadas. Cruza exposición y…</a:t>
             </a:r>
           </a:p>
         </p:txBody>
@@ -4331,7 +4932,7 @@
                   <a:srgbClr val="0B3D2E"/>
                 </a:solidFill>
               </a:rPr>
-              <a:t>🧰 Herramientas y preparación</a:t>
+              <a:t>📔 Glosario operativo</a:t>
             </a:r>
           </a:p>
         </p:txBody>
@@ -4369,82 +4970,82 @@
                   <a:srgbClr val="22282E"/>
                 </a:solidFill>
               </a:rPr>
-              <a:t>•  DefectDojo (open source) — plataforma de gestión y consolidación de hallazgos.</a:t>
-            </a:r>
-          </a:p>
-          <a:p>
-            <a:pPr>
-              <a:spcAft>
-                <a:spcPts val="600"/>
-              </a:spcAft>
-            </a:pPr>
-            <a:r>
-              <a:rPr sz="1500">
-                <a:solidFill>
-                  <a:srgbClr val="22282E"/>
-                </a:solidFill>
-              </a:rPr>
-              <a:t>•  Trivy / Semgrep / ZAP — fuentes de hallazgos (clases anteriores).</a:t>
-            </a:r>
-          </a:p>
-          <a:p>
-            <a:pPr>
-              <a:spcAft>
-                <a:spcPts val="600"/>
-              </a:spcAft>
-            </a:pPr>
-            <a:r>
-              <a:rPr sz="1500">
-                <a:solidFill>
-                  <a:srgbClr val="22282E"/>
-                </a:solidFill>
-              </a:rPr>
-              <a:t>•  CISA KEV y EPSS — señales de priorización.</a:t>
-            </a:r>
-          </a:p>
-          <a:p>
-            <a:pPr>
-              <a:spcAft>
-                <a:spcPts val="600"/>
-              </a:spcAft>
-            </a:pPr>
-            <a:r>
-              <a:rPr sz="1500">
-                <a:solidFill>
-                  <a:srgbClr val="22282E"/>
-                </a:solidFill>
-              </a:rPr>
-              <a:t>•  Hoja de cálculo o issue tracker (Jira/GitHub Issues) para el flujo si no usas DefectDojo.</a:t>
-            </a:r>
-          </a:p>
-          <a:p>
-            <a:pPr>
-              <a:spcAft>
-                <a:spcPts val="600"/>
-              </a:spcAft>
-            </a:pPr>
-            <a:r>
-              <a:rPr sz="1500">
-                <a:solidFill>
-                  <a:srgbClr val="22282E"/>
-                </a:solidFill>
-              </a:rPr>
-              <a:t>•  git clone https://github.com/DefectDojo/django-DefectDojo</a:t>
-            </a:r>
-          </a:p>
-          <a:p>
-            <a:pPr>
-              <a:spcAft>
-                <a:spcPts val="600"/>
-              </a:spcAft>
-            </a:pPr>
-            <a:r>
-              <a:rPr sz="1500">
-                <a:solidFill>
-                  <a:srgbClr val="22282E"/>
-                </a:solidFill>
-              </a:rPr>
-              <a:t>•  cd django-DefectDojo &amp;&amp; docker compose up -d</a:t>
+              <a:t>•  Término — Definición útil</a:t>
+            </a:r>
+          </a:p>
+          <a:p>
+            <a:pPr>
+              <a:spcAft>
+                <a:spcPts val="600"/>
+              </a:spcAft>
+            </a:pPr>
+            <a:r>
+              <a:rPr sz="1500">
+                <a:solidFill>
+                  <a:srgbClr val="22282E"/>
+                </a:solidFill>
+              </a:rPr>
+              <a:t>•  Instancia — Aparición concreta de una vulnerabilidad en un activo o artefacto.</a:t>
+            </a:r>
+          </a:p>
+          <a:p>
+            <a:pPr>
+              <a:spcAft>
+                <a:spcPts val="600"/>
+              </a:spcAft>
+            </a:pPr>
+            <a:r>
+              <a:rPr sz="1500">
+                <a:solidFill>
+                  <a:srgbClr val="22282E"/>
+                </a:solidFill>
+              </a:rPr>
+              <a:t>•  SLA — Compromiso temporal condicionado por riesgo y proceso definido.</a:t>
+            </a:r>
+          </a:p>
+          <a:p>
+            <a:pPr>
+              <a:spcAft>
+                <a:spcPts val="600"/>
+              </a:spcAft>
+            </a:pPr>
+            <a:r>
+              <a:rPr sz="1500">
+                <a:solidFill>
+                  <a:srgbClr val="22282E"/>
+                </a:solidFill>
+              </a:rPr>
+              <a:t>•  Riesgo residual — Riesgo que permanece después del tratamiento.</a:t>
+            </a:r>
+          </a:p>
+          <a:p>
+            <a:pPr>
+              <a:spcAft>
+                <a:spcPts val="600"/>
+              </a:spcAft>
+            </a:pPr>
+            <a:r>
+              <a:rPr sz="1500">
+                <a:solidFill>
+                  <a:srgbClr val="22282E"/>
+                </a:solidFill>
+              </a:rPr>
+              <a:t>•  Control compensatorio — Medida alternativa que reduce riesgo sin eliminar la causa.</a:t>
+            </a:r>
+          </a:p>
+          <a:p>
+            <a:pPr>
+              <a:spcAft>
+                <a:spcPts val="600"/>
+              </a:spcAft>
+            </a:pPr>
+            <a:r>
+              <a:rPr sz="1500">
+                <a:solidFill>
+                  <a:srgbClr val="22282E"/>
+                </a:solidFill>
+              </a:rPr>
+              <a:t>•  Reapertura — Evidencia de que la corrección no eliminó o reintrodujo el problema.</a:t>
             </a:r>
           </a:p>
         </p:txBody>
@@ -4495,7 +5096,7 @@
                   <a:srgbClr val="0B3D2E"/>
                 </a:solidFill>
               </a:rPr>
-              <a:t>🧪 Laboratorio guiado</a:t>
+              <a:t>✅ Criterio de dominio</a:t>
             </a:r>
           </a:p>
         </p:txBody>
@@ -4533,97 +5134,7 @@
                   <a:srgbClr val="22282E"/>
                 </a:solidFill>
               </a:rPr>
-              <a:t>•  Ejercicio de proceso (defensivo, sobre hallazgos propios):</a:t>
-            </a:r>
-          </a:p>
-          <a:p>
-            <a:pPr>
-              <a:spcAft>
-                <a:spcPts val="600"/>
-              </a:spcAft>
-            </a:pPr>
-            <a:r>
-              <a:rPr sz="1500">
-                <a:solidFill>
-                  <a:srgbClr val="22282E"/>
-                </a:solidFill>
-              </a:rPr>
-              <a:t>•  Recolecta hallazgos. Exporta resultados de Trivy (SCA/imagen), Semgrep (SAST) y ZAP (DAST) de tus prácticas en formato JSON.</a:t>
-            </a:r>
-          </a:p>
-          <a:p>
-            <a:pPr>
-              <a:spcAft>
-                <a:spcPts val="600"/>
-              </a:spcAft>
-            </a:pPr>
-            <a:r>
-              <a:rPr sz="1500">
-                <a:solidFill>
-                  <a:srgbClr val="22282E"/>
-                </a:solidFill>
-              </a:rPr>
-              <a:t>•  Consolida en DefectDojo. Crea un producto y engagement, importa los tres informes. Observa cómo deduplica hallazgos repetidos entre escaneos.</a:t>
-            </a:r>
-          </a:p>
-          <a:p>
-            <a:pPr>
-              <a:spcAft>
-                <a:spcPts val="600"/>
-              </a:spcAft>
-            </a:pPr>
-            <a:r>
-              <a:rPr sz="1500">
-                <a:solidFill>
-                  <a:srgbClr val="22282E"/>
-                </a:solidFill>
-              </a:rPr>
-              <a:t>•  Enriquece con señales de riesgo. Para los top 20 hallazgos, añade EPSS y marca los que están en CISA KEV.</a:t>
-            </a:r>
-          </a:p>
-          <a:p>
-            <a:pPr>
-              <a:spcAft>
-                <a:spcPts val="600"/>
-              </a:spcAft>
-            </a:pPr>
-            <a:r>
-              <a:rPr sz="1500">
-                <a:solidFill>
-                  <a:srgbClr val="22282E"/>
-                </a:solidFill>
-              </a:rPr>
-              <a:t>•  Prioriza. Ordena por un score compuesto: severidad × exposición (¿internet-facing?) × criticidad del activo, elevando los KEV/EPSS alto. Documenta el criterio.</a:t>
-            </a:r>
-          </a:p>
-          <a:p>
-            <a:pPr>
-              <a:spcAft>
-                <a:spcPts val="600"/>
-              </a:spcAft>
-            </a:pPr>
-            <a:r>
-              <a:rPr sz="1500">
-                <a:solidFill>
-                  <a:srgbClr val="22282E"/>
-                </a:solidFill>
-              </a:rPr>
-              <a:t>•  Asigna SLAs. Define plazos, p. ej.: Crítica explotable 7 días, Alta 30, Media 90, Baja 180. Asigna dueño a cada hallazgo top.</a:t>
-            </a:r>
-          </a:p>
-          <a:p>
-            <a:pPr>
-              <a:spcAft>
-                <a:spcPts val="600"/>
-              </a:spcAft>
-            </a:pPr>
-            <a:r>
-              <a:rPr sz="1500">
-                <a:solidFill>
-                  <a:srgbClr val="22282E"/>
-                </a:solidFill>
-              </a:rPr>
-              <a:t>•  Documenta excepciones con VEX. Para un CVE en una función que no usas, redacta un statement "not affected" con justificación.</a:t>
+              <a:t>•  El alumno domina el programa cuando puede convertir hallazgos heterogéneos en instancias trazables, ordenar con contexto, asignar tratamiento y vencimiento, verificar el cierre y elegir métricas que…</a:t>
             </a:r>
           </a:p>
         </p:txBody>
@@ -4674,7 +5185,7 @@
                   <a:srgbClr val="0B3D2E"/>
                 </a:solidFill>
               </a:rPr>
-              <a:t>✍️ Ejercicios</a:t>
+              <a:t>📖 Definiciones y características</a:t>
             </a:r>
           </a:p>
         </p:txBody>
@@ -4712,82 +5223,82 @@
                   <a:srgbClr val="22282E"/>
                 </a:solidFill>
               </a:rPr>
-              <a:t>•  Dibuja el ciclo de vida de una vulnerabilidad en tu organización.</a:t>
-            </a:r>
-          </a:p>
-          <a:p>
-            <a:pPr>
-              <a:spcAft>
-                <a:spcPts val="600"/>
-              </a:spcAft>
-            </a:pPr>
-            <a:r>
-              <a:rPr sz="1500">
-                <a:solidFill>
-                  <a:srgbClr val="22282E"/>
-                </a:solidFill>
-              </a:rPr>
-              <a:t>•  Consolida hallazgos de dos herramientas y cuenta los duplicados eliminados.</a:t>
-            </a:r>
-          </a:p>
-          <a:p>
-            <a:pPr>
-              <a:spcAft>
-                <a:spcPts val="600"/>
-              </a:spcAft>
-            </a:pPr>
-            <a:r>
-              <a:rPr sz="1500">
-                <a:solidFill>
-                  <a:srgbClr val="22282E"/>
-                </a:solidFill>
-              </a:rPr>
-              <a:t>•  Prioriza 10 hallazgos con un modelo que combine CVSS, EPSS y KEV.</a:t>
-            </a:r>
-          </a:p>
-          <a:p>
-            <a:pPr>
-              <a:spcAft>
-                <a:spcPts val="600"/>
-              </a:spcAft>
-            </a:pPr>
-            <a:r>
-              <a:rPr sz="1500">
-                <a:solidFill>
-                  <a:srgbClr val="22282E"/>
-                </a:solidFill>
-              </a:rPr>
-              <a:t>•  Define una tabla de SLAs por severidad y justifica los plazos.</a:t>
-            </a:r>
-          </a:p>
-          <a:p>
-            <a:pPr>
-              <a:spcAft>
-                <a:spcPts val="600"/>
-              </a:spcAft>
-            </a:pPr>
-            <a:r>
-              <a:rPr sz="1500">
-                <a:solidFill>
-                  <a:srgbClr val="22282E"/>
-                </a:solidFill>
-              </a:rPr>
-              <a:t>•  Redacta un statement VEX "not affected" para un CVE concreto.</a:t>
-            </a:r>
-          </a:p>
-          <a:p>
-            <a:pPr>
-              <a:spcAft>
-                <a:spcPts val="600"/>
-              </a:spcAft>
-            </a:pPr>
-            <a:r>
-              <a:rPr sz="1500">
-                <a:solidFill>
-                  <a:srgbClr val="22282E"/>
-                </a:solidFill>
-              </a:rPr>
-              <a:t>•  Calcula el MTTR de un conjunto de hallazgos con fechas de apertura/cierre.</a:t>
+              <a:t>•  Gestión de vulnerabilidades: proceso continuo de identificar, evaluar, tratar y reportar vulnerabilidades. Característica: es un ciclo, no un evento puntual.</a:t>
+            </a:r>
+          </a:p>
+          <a:p>
+            <a:pPr>
+              <a:spcAft>
+                <a:spcPts val="600"/>
+              </a:spcAft>
+            </a:pPr>
+            <a:r>
+              <a:rPr sz="1500">
+                <a:solidFill>
+                  <a:srgbClr val="22282E"/>
+                </a:solidFill>
+              </a:rPr>
+              <a:t>•  Triage: clasificar un hallazgo (real/falso, severidad, dueño). Característica: filtra ruido antes de asignar trabajo.</a:t>
+            </a:r>
+          </a:p>
+          <a:p>
+            <a:pPr>
+              <a:spcAft>
+                <a:spcPts val="600"/>
+              </a:spcAft>
+            </a:pPr>
+            <a:r>
+              <a:rPr sz="1500">
+                <a:solidFill>
+                  <a:srgbClr val="22282E"/>
+                </a:solidFill>
+              </a:rPr>
+              <a:t>•  Priorización basada en riesgo (RBVM): ordenar por riesgo real, no solo por CVSS. Característica: combina severidad, explotabilidad, exposición y valor del activo.</a:t>
+            </a:r>
+          </a:p>
+          <a:p>
+            <a:pPr>
+              <a:spcAft>
+                <a:spcPts val="600"/>
+              </a:spcAft>
+            </a:pPr>
+            <a:r>
+              <a:rPr sz="1500">
+                <a:solidFill>
+                  <a:srgbClr val="22282E"/>
+                </a:solidFill>
+              </a:rPr>
+              <a:t>•  SLA de remediación: plazo máximo para corregir según severidad. Característica: hace el compromiso medible y auditable.</a:t>
+            </a:r>
+          </a:p>
+          <a:p>
+            <a:pPr>
+              <a:spcAft>
+                <a:spcPts val="600"/>
+              </a:spcAft>
+            </a:pPr>
+            <a:r>
+              <a:rPr sz="1500">
+                <a:solidFill>
+                  <a:srgbClr val="22282E"/>
+                </a:solidFill>
+              </a:rPr>
+              <a:t>•  VEX: Vulnerability Exploitability eXchange, documento que declara si un CVE es explotable en tu producto. Característica: reduce ruido justificando "not affected".</a:t>
+            </a:r>
+          </a:p>
+          <a:p>
+            <a:pPr>
+              <a:spcAft>
+                <a:spcPts val="600"/>
+              </a:spcAft>
+            </a:pPr>
+            <a:r>
+              <a:rPr sz="1500">
+                <a:solidFill>
+                  <a:srgbClr val="22282E"/>
+                </a:solidFill>
+              </a:rPr>
+              <a:t>•  MTTR: tiempo medio de remediación. Característica: métrica clave de la salud del programa.</a:t>
             </a:r>
           </a:p>
         </p:txBody>
@@ -4838,7 +5349,7 @@
                   <a:srgbClr val="0B3D2E"/>
                 </a:solidFill>
               </a:rPr>
-              <a:t>📝 Reto verificable</a:t>
+              <a:t>🧰 Herramientas y preparación</a:t>
             </a:r>
           </a:p>
         </p:txBody>
@@ -4876,82 +5387,52 @@
                   <a:srgbClr val="22282E"/>
                 </a:solidFill>
               </a:rPr>
-              <a:t>•  Opera un mini-programa de gestión de vulnerabilidades sobre hallazgos reales de tus prácticas.</a:t>
-            </a:r>
-          </a:p>
-          <a:p>
-            <a:pPr>
-              <a:spcAft>
-                <a:spcPts val="600"/>
-              </a:spcAft>
-            </a:pPr>
-            <a:r>
-              <a:rPr sz="1500">
-                <a:solidFill>
-                  <a:srgbClr val="22282E"/>
-                </a:solidFill>
-              </a:rPr>
-              <a:t>•  Criterio de aceptación: (a) los hallazgos de al menos tres herramientas están consolidados</a:t>
-            </a:r>
-          </a:p>
-          <a:p>
-            <a:pPr>
-              <a:spcAft>
-                <a:spcPts val="600"/>
-              </a:spcAft>
-            </a:pPr>
-            <a:r>
-              <a:rPr sz="1500">
-                <a:solidFill>
-                  <a:srgbClr val="22282E"/>
-                </a:solidFill>
-              </a:rPr>
-              <a:t>•  y deduplicados; (b) existe un modelo de priorización documentado que va más allá de CVSS</a:t>
-            </a:r>
-          </a:p>
-          <a:p>
-            <a:pPr>
-              <a:spcAft>
-                <a:spcPts val="600"/>
-              </a:spcAft>
-            </a:pPr>
-            <a:r>
-              <a:rPr sz="1500">
-                <a:solidFill>
-                  <a:srgbClr val="22282E"/>
-                </a:solidFill>
-              </a:rPr>
-              <a:t>•  (incluye EPSS/KEV/exposición); (c) hay SLAs por severidad y cada hallazgo top tiene dueño y</a:t>
-            </a:r>
-          </a:p>
-          <a:p>
-            <a:pPr>
-              <a:spcAft>
-                <a:spcPts val="600"/>
-              </a:spcAft>
-            </a:pPr>
-            <a:r>
-              <a:rPr sz="1500">
-                <a:solidFill>
-                  <a:srgbClr val="22282E"/>
-                </a:solidFill>
-              </a:rPr>
-              <a:t>•  plazo; (d) al menos una excepción está documentada como VEX; y (e) se reporta MTTR y backlog</a:t>
-            </a:r>
-          </a:p>
-          <a:p>
-            <a:pPr>
-              <a:spcAft>
-                <a:spcPts val="600"/>
-              </a:spcAft>
-            </a:pPr>
-            <a:r>
-              <a:rPr sz="1500">
-                <a:solidFill>
-                  <a:srgbClr val="22282E"/>
-                </a:solidFill>
-              </a:rPr>
-              <a:t>•  por severidad.</a:t>
+              <a:t>•  DefectDojo (open source) — plataforma de gestión y consolidación de hallazgos.</a:t>
+            </a:r>
+          </a:p>
+          <a:p>
+            <a:pPr>
+              <a:spcAft>
+                <a:spcPts val="600"/>
+              </a:spcAft>
+            </a:pPr>
+            <a:r>
+              <a:rPr sz="1500">
+                <a:solidFill>
+                  <a:srgbClr val="22282E"/>
+                </a:solidFill>
+              </a:rPr>
+              <a:t>•  Trivy / Semgrep / ZAP — fuentes de hallazgos (clases anteriores).</a:t>
+            </a:r>
+          </a:p>
+          <a:p>
+            <a:pPr>
+              <a:spcAft>
+                <a:spcPts val="600"/>
+              </a:spcAft>
+            </a:pPr>
+            <a:r>
+              <a:rPr sz="1500">
+                <a:solidFill>
+                  <a:srgbClr val="22282E"/>
+                </a:solidFill>
+              </a:rPr>
+              <a:t>•  CISA KEV y EPSS — señales de priorización.</a:t>
+            </a:r>
+          </a:p>
+          <a:p>
+            <a:pPr>
+              <a:spcAft>
+                <a:spcPts val="600"/>
+              </a:spcAft>
+            </a:pPr>
+            <a:r>
+              <a:rPr sz="1500">
+                <a:solidFill>
+                  <a:srgbClr val="22282E"/>
+                </a:solidFill>
+              </a:rPr>
+              <a:t>•  Hoja de cálculo o issue tracker (Jira/GitHub Issues) para el flujo si no usas DefectDojo.</a:t>
             </a:r>
           </a:p>
         </p:txBody>
